--- a/EDRMS_Workshop_Slides_20260825.pptx
+++ b/EDRMS_Workshop_Slides_20260825.pptx
@@ -2378,7 +2378,7 @@
                 <a:ea typeface="Cambria" pitchFamily="34" charset="-122"/>
                 <a:cs typeface="Cambria" pitchFamily="34" charset="-120"/>
               </a:rPr>
-              <a:t>How to Read the Gap Checker</a:t>
+              <a:t>The Gap Checker: Your Requirements File</a:t>
             </a:r>
             <a:endParaRPr lang="en-US" sz="3200" dirty="0"/>
           </a:p>
@@ -2417,7 +2417,7 @@
                 <a:ea typeface="Calibri" pitchFamily="34" charset="-122"/>
                 <a:cs typeface="Calibri" pitchFamily="34" charset="-120"/>
               </a:rPr>
-              <a:t>One workbook, six tabs, 250 requirements — and the columns that matter</a:t>
+              <a:t>Everything proposed for the Utilization Report, with the mockups beside it</a:t>
             </a:r>
             <a:endParaRPr lang="en-US" sz="1400" dirty="0"/>
           </a:p>
@@ -2448,365 +2448,14 @@
       </p:sp>
       <p:sp>
         <p:nvSpPr>
-          <p:cNvPr id="18" name="Text 16"/>
+          <p:cNvPr id="18" name="Shape 16"/>
           <p:cNvSpPr/>
           <p:nvPr/>
         </p:nvSpPr>
         <p:spPr>
           <a:xfrm>
             <a:off x="548640" y="1481328"/>
-            <a:ext cx="1371600" cy="502920"/>
-          </a:xfrm>
-          <a:prstGeom prst="rect">
-            <a:avLst/>
-          </a:prstGeom>
-          <a:noFill/>
-          <a:ln/>
-        </p:spPr>
-        <p:txBody>
-          <a:bodyPr wrap="square" rtlCol="0" anchor="ctr"/>
-          <a:lstStyle/>
-          <a:p>
-            <a:pPr indent="0" marL="0">
-              <a:buNone/>
-            </a:pPr>
-            <a:r>
-              <a:rPr lang="en-US" sz="3400" b="1" dirty="0">
-                <a:solidFill>
-                  <a:srgbClr val="003D5B"/>
-                </a:solidFill>
-                <a:latin typeface="Cambria" pitchFamily="34" charset="0"/>
-                <a:ea typeface="Cambria" pitchFamily="34" charset="-122"/>
-                <a:cs typeface="Cambria" pitchFamily="34" charset="-120"/>
-              </a:rPr>
-              <a:t>250</a:t>
-            </a:r>
-            <a:endParaRPr lang="en-US" sz="3400" dirty="0"/>
-          </a:p>
-        </p:txBody>
-      </p:sp>
-      <p:sp>
-        <p:nvSpPr>
-          <p:cNvPr id="19" name="Text 17"/>
-          <p:cNvSpPr/>
-          <p:nvPr/>
-        </p:nvSpPr>
-        <p:spPr>
-          <a:xfrm>
-            <a:off x="548640" y="1984248"/>
-            <a:ext cx="1463040" cy="274320"/>
-          </a:xfrm>
-          <a:prstGeom prst="rect">
-            <a:avLst/>
-          </a:prstGeom>
-          <a:noFill/>
-          <a:ln/>
-        </p:spPr>
-        <p:txBody>
-          <a:bodyPr wrap="square" rtlCol="0" anchor="ctr"/>
-          <a:lstStyle/>
-          <a:p>
-            <a:pPr indent="0" marL="0">
-              <a:buNone/>
-            </a:pPr>
-            <a:r>
-              <a:rPr lang="en-US" sz="1000" dirty="0">
-                <a:solidFill>
-                  <a:srgbClr val="6B7280"/>
-                </a:solidFill>
-                <a:latin typeface="Calibri" pitchFamily="34" charset="0"/>
-                <a:ea typeface="Calibri" pitchFamily="34" charset="-122"/>
-                <a:cs typeface="Calibri" pitchFamily="34" charset="-120"/>
-              </a:rPr>
-              <a:t>requirements</a:t>
-            </a:r>
-            <a:endParaRPr lang="en-US" sz="1000" dirty="0"/>
-          </a:p>
-        </p:txBody>
-      </p:sp>
-      <p:sp>
-        <p:nvSpPr>
-          <p:cNvPr id="20" name="Text 18"/>
-          <p:cNvSpPr/>
-          <p:nvPr/>
-        </p:nvSpPr>
-        <p:spPr>
-          <a:xfrm>
-            <a:off x="2148840" y="1481328"/>
-            <a:ext cx="1371600" cy="502920"/>
-          </a:xfrm>
-          <a:prstGeom prst="rect">
-            <a:avLst/>
-          </a:prstGeom>
-          <a:noFill/>
-          <a:ln/>
-        </p:spPr>
-        <p:txBody>
-          <a:bodyPr wrap="square" rtlCol="0" anchor="ctr"/>
-          <a:lstStyle/>
-          <a:p>
-            <a:pPr indent="0" marL="0">
-              <a:buNone/>
-            </a:pPr>
-            <a:r>
-              <a:rPr lang="en-US" sz="3400" b="1" dirty="0">
-                <a:solidFill>
-                  <a:srgbClr val="009B8A"/>
-                </a:solidFill>
-                <a:latin typeface="Cambria" pitchFamily="34" charset="0"/>
-                <a:ea typeface="Cambria" pitchFamily="34" charset="-122"/>
-                <a:cs typeface="Cambria" pitchFamily="34" charset="-120"/>
-              </a:rPr>
-              <a:t>193</a:t>
-            </a:r>
-            <a:endParaRPr lang="en-US" sz="3400" dirty="0"/>
-          </a:p>
-        </p:txBody>
-      </p:sp>
-      <p:sp>
-        <p:nvSpPr>
-          <p:cNvPr id="21" name="Text 19"/>
-          <p:cNvSpPr/>
-          <p:nvPr/>
-        </p:nvSpPr>
-        <p:spPr>
-          <a:xfrm>
-            <a:off x="2148840" y="1984248"/>
-            <a:ext cx="1463040" cy="274320"/>
-          </a:xfrm>
-          <a:prstGeom prst="rect">
-            <a:avLst/>
-          </a:prstGeom>
-          <a:noFill/>
-          <a:ln/>
-        </p:spPr>
-        <p:txBody>
-          <a:bodyPr wrap="square" rtlCol="0" anchor="ctr"/>
-          <a:lstStyle/>
-          <a:p>
-            <a:pPr indent="0" marL="0">
-              <a:buNone/>
-            </a:pPr>
-            <a:r>
-              <a:rPr lang="en-US" sz="1000" dirty="0">
-                <a:solidFill>
-                  <a:srgbClr val="6B7280"/>
-                </a:solidFill>
-                <a:latin typeface="Calibri" pitchFamily="34" charset="0"/>
-                <a:ea typeface="Calibri" pitchFamily="34" charset="-122"/>
-                <a:cs typeface="Calibri" pitchFamily="34" charset="-120"/>
-              </a:rPr>
-              <a:t>in the prototype</a:t>
-            </a:r>
-            <a:endParaRPr lang="en-US" sz="1000" dirty="0"/>
-          </a:p>
-        </p:txBody>
-      </p:sp>
-      <p:sp>
-        <p:nvSpPr>
-          <p:cNvPr id="22" name="Text 20"/>
-          <p:cNvSpPr/>
-          <p:nvPr/>
-        </p:nvSpPr>
-        <p:spPr>
-          <a:xfrm>
-            <a:off x="3749040" y="1481328"/>
-            <a:ext cx="1371600" cy="502920"/>
-          </a:xfrm>
-          <a:prstGeom prst="rect">
-            <a:avLst/>
-          </a:prstGeom>
-          <a:noFill/>
-          <a:ln/>
-        </p:spPr>
-        <p:txBody>
-          <a:bodyPr wrap="square" rtlCol="0" anchor="ctr"/>
-          <a:lstStyle/>
-          <a:p>
-            <a:pPr indent="0" marL="0">
-              <a:buNone/>
-            </a:pPr>
-            <a:r>
-              <a:rPr lang="en-US" sz="3400" b="1" dirty="0">
-                <a:solidFill>
-                  <a:srgbClr val="E67C3B"/>
-                </a:solidFill>
-                <a:latin typeface="Cambria" pitchFamily="34" charset="0"/>
-                <a:ea typeface="Cambria" pitchFamily="34" charset="-122"/>
-                <a:cs typeface="Cambria" pitchFamily="34" charset="-120"/>
-              </a:rPr>
-              <a:t>55</a:t>
-            </a:r>
-            <a:endParaRPr lang="en-US" sz="3400" dirty="0"/>
-          </a:p>
-        </p:txBody>
-      </p:sp>
-      <p:sp>
-        <p:nvSpPr>
-          <p:cNvPr id="23" name="Text 21"/>
-          <p:cNvSpPr/>
-          <p:nvPr/>
-        </p:nvSpPr>
-        <p:spPr>
-          <a:xfrm>
-            <a:off x="3749040" y="1984248"/>
-            <a:ext cx="1463040" cy="274320"/>
-          </a:xfrm>
-          <a:prstGeom prst="rect">
-            <a:avLst/>
-          </a:prstGeom>
-          <a:noFill/>
-          <a:ln/>
-        </p:spPr>
-        <p:txBody>
-          <a:bodyPr wrap="square" rtlCol="0" anchor="ctr"/>
-          <a:lstStyle/>
-          <a:p>
-            <a:pPr indent="0" marL="0">
-              <a:buNone/>
-            </a:pPr>
-            <a:r>
-              <a:rPr lang="en-US" sz="1000" dirty="0">
-                <a:solidFill>
-                  <a:srgbClr val="6B7280"/>
-                </a:solidFill>
-                <a:latin typeface="Calibri" pitchFamily="34" charset="0"/>
-                <a:ea typeface="Calibri" pitchFamily="34" charset="-122"/>
-                <a:cs typeface="Calibri" pitchFamily="34" charset="-120"/>
-              </a:rPr>
-              <a:t>not built</a:t>
-            </a:r>
-            <a:endParaRPr lang="en-US" sz="1000" dirty="0"/>
-          </a:p>
-        </p:txBody>
-      </p:sp>
-      <p:sp>
-        <p:nvSpPr>
-          <p:cNvPr id="24" name="Text 22"/>
-          <p:cNvSpPr/>
-          <p:nvPr/>
-        </p:nvSpPr>
-        <p:spPr>
-          <a:xfrm>
-            <a:off x="5349240" y="1481328"/>
-            <a:ext cx="1371600" cy="502920"/>
-          </a:xfrm>
-          <a:prstGeom prst="rect">
-            <a:avLst/>
-          </a:prstGeom>
-          <a:noFill/>
-          <a:ln/>
-        </p:spPr>
-        <p:txBody>
-          <a:bodyPr wrap="square" rtlCol="0" anchor="ctr"/>
-          <a:lstStyle/>
-          <a:p>
-            <a:pPr indent="0" marL="0">
-              <a:buNone/>
-            </a:pPr>
-            <a:r>
-              <a:rPr lang="en-US" sz="3400" b="1" dirty="0">
-                <a:solidFill>
-                  <a:srgbClr val="C41E3A"/>
-                </a:solidFill>
-                <a:latin typeface="Cambria" pitchFamily="34" charset="0"/>
-                <a:ea typeface="Cambria" pitchFamily="34" charset="-122"/>
-                <a:cs typeface="Cambria" pitchFamily="34" charset="-120"/>
-              </a:rPr>
-              <a:t>6</a:t>
-            </a:r>
-            <a:endParaRPr lang="en-US" sz="3400" dirty="0"/>
-          </a:p>
-        </p:txBody>
-      </p:sp>
-      <p:sp>
-        <p:nvSpPr>
-          <p:cNvPr id="25" name="Text 23"/>
-          <p:cNvSpPr/>
-          <p:nvPr/>
-        </p:nvSpPr>
-        <p:spPr>
-          <a:xfrm>
-            <a:off x="5349240" y="1984248"/>
-            <a:ext cx="1463040" cy="274320"/>
-          </a:xfrm>
-          <a:prstGeom prst="rect">
-            <a:avLst/>
-          </a:prstGeom>
-          <a:noFill/>
-          <a:ln/>
-        </p:spPr>
-        <p:txBody>
-          <a:bodyPr wrap="square" rtlCol="0" anchor="ctr"/>
-          <a:lstStyle/>
-          <a:p>
-            <a:pPr indent="0" marL="0">
-              <a:buNone/>
-            </a:pPr>
-            <a:r>
-              <a:rPr lang="en-US" sz="1000" dirty="0">
-                <a:solidFill>
-                  <a:srgbClr val="6B7280"/>
-                </a:solidFill>
-                <a:latin typeface="Calibri" pitchFamily="34" charset="0"/>
-                <a:ea typeface="Calibri" pitchFamily="34" charset="-122"/>
-                <a:cs typeface="Calibri" pitchFamily="34" charset="-120"/>
-              </a:rPr>
-              <a:t>things block most of it</a:t>
-            </a:r>
-            <a:endParaRPr lang="en-US" sz="1000" dirty="0"/>
-          </a:p>
-        </p:txBody>
-      </p:sp>
-      <p:sp>
-        <p:nvSpPr>
-          <p:cNvPr id="26" name="Text 24"/>
-          <p:cNvSpPr/>
-          <p:nvPr/>
-        </p:nvSpPr>
-        <p:spPr>
-          <a:xfrm>
-            <a:off x="548640" y="2532888"/>
-            <a:ext cx="11094415" cy="237744"/>
-          </a:xfrm>
-          <a:prstGeom prst="rect">
-            <a:avLst/>
-          </a:prstGeom>
-          <a:noFill/>
-          <a:ln/>
-        </p:spPr>
-        <p:txBody>
-          <a:bodyPr wrap="square" rtlCol="0" anchor="ctr"/>
-          <a:lstStyle/>
-          <a:p>
-            <a:pPr indent="0" marL="0">
-              <a:buNone/>
-            </a:pPr>
-            <a:r>
-              <a:rPr lang="en-US" sz="1000" b="1" spc="140" kern="0" dirty="0">
-                <a:solidFill>
-                  <a:srgbClr val="003D5B"/>
-                </a:solidFill>
-                <a:latin typeface="Calibri" pitchFamily="34" charset="0"/>
-                <a:ea typeface="Calibri" pitchFamily="34" charset="-122"/>
-                <a:cs typeface="Calibri" pitchFamily="34" charset="-120"/>
-              </a:rPr>
-              <a:t>THE FOUR COLUMNS TO READ</a:t>
-            </a:r>
-            <a:endParaRPr lang="en-US" sz="1000" dirty="0"/>
-          </a:p>
-        </p:txBody>
-      </p:sp>
-      <p:sp>
-        <p:nvSpPr>
-          <p:cNvPr id="27" name="Shape 25"/>
-          <p:cNvSpPr/>
-          <p:nvPr/>
-        </p:nvSpPr>
-        <p:spPr>
-          <a:xfrm>
-            <a:off x="548640" y="2862072"/>
-            <a:ext cx="50292" cy="475488"/>
+            <a:ext cx="3515258" cy="45720"/>
           </a:xfrm>
           <a:prstGeom prst="rect">
             <a:avLst/>
@@ -2819,30 +2468,30 @@
       </p:sp>
       <p:sp>
         <p:nvSpPr>
-          <p:cNvPr id="28" name="Text 26"/>
-          <p:cNvSpPr/>
-          <p:nvPr/>
-        </p:nvSpPr>
-        <p:spPr>
-          <a:xfrm>
-            <a:off x="731520" y="2843784"/>
-            <a:ext cx="3291840" cy="256032"/>
-          </a:xfrm>
-          <a:prstGeom prst="rect">
-            <a:avLst/>
-          </a:prstGeom>
-          <a:noFill/>
-          <a:ln/>
-        </p:spPr>
-        <p:txBody>
-          <a:bodyPr wrap="square" rtlCol="0" anchor="ctr"/>
-          <a:lstStyle/>
-          <a:p>
-            <a:pPr indent="0" marL="0">
-              <a:buNone/>
-            </a:pPr>
-            <a:r>
-              <a:rPr lang="en-US" sz="1150" b="1" dirty="0">
+          <p:cNvPr id="19" name="Text 17"/>
+          <p:cNvSpPr/>
+          <p:nvPr/>
+        </p:nvSpPr>
+        <p:spPr>
+          <a:xfrm>
+            <a:off x="548640" y="1627632"/>
+            <a:ext cx="3515258" cy="274320"/>
+          </a:xfrm>
+          <a:prstGeom prst="rect">
+            <a:avLst/>
+          </a:prstGeom>
+          <a:noFill/>
+          <a:ln/>
+        </p:spPr>
+        <p:txBody>
+          <a:bodyPr wrap="square" rtlCol="0" anchor="ctr"/>
+          <a:lstStyle/>
+          <a:p>
+            <a:pPr indent="0" marL="0">
+              <a:buNone/>
+            </a:pPr>
+            <a:r>
+              <a:rPr lang="en-US" sz="1300" b="1" dirty="0">
                 <a:solidFill>
                   <a:srgbClr val="003D5B"/>
                 </a:solidFill>
@@ -2850,22 +2499,22 @@
                 <a:ea typeface="Calibri" pitchFamily="34" charset="-122"/>
                 <a:cs typeface="Calibri" pitchFamily="34" charset="-120"/>
               </a:rPr>
-              <a:t>In the prototype?</a:t>
-            </a:r>
-            <a:endParaRPr lang="en-US" sz="1150" dirty="0"/>
-          </a:p>
-        </p:txBody>
-      </p:sp>
-      <p:sp>
-        <p:nvSpPr>
-          <p:cNvPr id="29" name="Text 27"/>
-          <p:cNvSpPr/>
-          <p:nvPr/>
-        </p:nvSpPr>
-        <p:spPr>
-          <a:xfrm>
-            <a:off x="4114800" y="2843784"/>
-            <a:ext cx="7436815" cy="457200"/>
+              <a:t>Every requirement, one row each</a:t>
+            </a:r>
+            <a:endParaRPr lang="en-US" sz="1300" dirty="0"/>
+          </a:p>
+        </p:txBody>
+      </p:sp>
+      <p:sp>
+        <p:nvSpPr>
+          <p:cNvPr id="20" name="Text 18"/>
+          <p:cNvSpPr/>
+          <p:nvPr/>
+        </p:nvSpPr>
+        <p:spPr>
+          <a:xfrm>
+            <a:off x="548640" y="1938528"/>
+            <a:ext cx="3515258" cy="658368"/>
           </a:xfrm>
           <a:prstGeom prst="rect">
             <a:avLst/>
@@ -2889,7 +2538,7 @@
                 <a:ea typeface="Calibri" pitchFamily="34" charset="-122"/>
                 <a:cs typeface="Calibri" pitchFamily="34" charset="-120"/>
               </a:rPr>
-              <a:t>Yes or No. This is the honest state of the build today, not a plan.</a:t>
+              <a:t>Every indicator, KPI, tile, table, column and profile field proposed for the Utilization Report, in one place. This file is the requirements document.</a:t>
             </a:r>
             <a:endParaRPr lang="en-US" sz="1000" dirty="0"/>
           </a:p>
@@ -2897,14 +2546,14 @@
       </p:sp>
       <p:sp>
         <p:nvSpPr>
-          <p:cNvPr id="30" name="Shape 28"/>
-          <p:cNvSpPr/>
-          <p:nvPr/>
-        </p:nvSpPr>
-        <p:spPr>
-          <a:xfrm>
-            <a:off x="548640" y="3429000"/>
-            <a:ext cx="50292" cy="475488"/>
+          <p:cNvPr id="21" name="Shape 19"/>
+          <p:cNvSpPr/>
+          <p:nvPr/>
+        </p:nvSpPr>
+        <p:spPr>
+          <a:xfrm>
+            <a:off x="4338218" y="1481328"/>
+            <a:ext cx="3515258" cy="45720"/>
           </a:xfrm>
           <a:prstGeom prst="rect">
             <a:avLst/>
@@ -2917,30 +2566,30 @@
       </p:sp>
       <p:sp>
         <p:nvSpPr>
-          <p:cNvPr id="31" name="Text 29"/>
-          <p:cNvSpPr/>
-          <p:nvPr/>
-        </p:nvSpPr>
-        <p:spPr>
-          <a:xfrm>
-            <a:off x="731520" y="3410712"/>
-            <a:ext cx="3291840" cy="256032"/>
-          </a:xfrm>
-          <a:prstGeom prst="rect">
-            <a:avLst/>
-          </a:prstGeom>
-          <a:noFill/>
-          <a:ln/>
-        </p:spPr>
-        <p:txBody>
-          <a:bodyPr wrap="square" rtlCol="0" anchor="ctr"/>
-          <a:lstStyle/>
-          <a:p>
-            <a:pPr indent="0" marL="0">
-              <a:buNone/>
-            </a:pPr>
-            <a:r>
-              <a:rPr lang="en-US" sz="1150" b="1" dirty="0">
+          <p:cNvPr id="22" name="Text 20"/>
+          <p:cNvSpPr/>
+          <p:nvPr/>
+        </p:nvSpPr>
+        <p:spPr>
+          <a:xfrm>
+            <a:off x="4338218" y="1627632"/>
+            <a:ext cx="3515258" cy="274320"/>
+          </a:xfrm>
+          <a:prstGeom prst="rect">
+            <a:avLst/>
+          </a:prstGeom>
+          <a:noFill/>
+          <a:ln/>
+        </p:spPr>
+        <p:txBody>
+          <a:bodyPr wrap="square" rtlCol="0" anchor="ctr"/>
+          <a:lstStyle/>
+          <a:p>
+            <a:pPr indent="0" marL="0">
+              <a:buNone/>
+            </a:pPr>
+            <a:r>
+              <a:rPr lang="en-US" sz="1300" b="1" dirty="0">
                 <a:solidFill>
                   <a:srgbClr val="003D5B"/>
                 </a:solidFill>
@@ -2948,22 +2597,22 @@
                 <a:ea typeface="Calibri" pitchFamily="34" charset="-122"/>
                 <a:cs typeface="Calibri" pitchFamily="34" charset="-120"/>
               </a:rPr>
-              <a:t>Why it is not there</a:t>
-            </a:r>
-            <a:endParaRPr lang="en-US" sz="1150" dirty="0"/>
-          </a:p>
-        </p:txBody>
-      </p:sp>
-      <p:sp>
-        <p:nvSpPr>
-          <p:cNvPr id="32" name="Text 30"/>
-          <p:cNvSpPr/>
-          <p:nvPr/>
-        </p:nvSpPr>
-        <p:spPr>
-          <a:xfrm>
-            <a:off x="4114800" y="3410712"/>
-            <a:ext cx="7436815" cy="457200"/>
+              <a:t>The mockups sit beside them</a:t>
+            </a:r>
+            <a:endParaRPr lang="en-US" sz="1300" dirty="0"/>
+          </a:p>
+        </p:txBody>
+      </p:sp>
+      <p:sp>
+        <p:nvSpPr>
+          <p:cNvPr id="23" name="Text 21"/>
+          <p:cNvSpPr/>
+          <p:nvPr/>
+        </p:nvSpPr>
+        <p:spPr>
+          <a:xfrm>
+            <a:off x="4338218" y="1938528"/>
+            <a:ext cx="3515258" cy="658368"/>
           </a:xfrm>
           <a:prstGeom prst="rect">
             <a:avLst/>
@@ -2987,7 +2636,7 @@
                 <a:ea typeface="Calibri" pitchFamily="34" charset="-122"/>
                 <a:cs typeface="Calibri" pitchFamily="34" charset="-120"/>
               </a:rPr>
-              <a:t>The reason a requirement was removed or relabelled. Read this before assuming anything is missing by accident.</a:t>
+              <a:t>Each row points to the screen it appears on, so you can see the thing rather than imagine it.</a:t>
             </a:r>
             <a:endParaRPr lang="en-US" sz="1000" dirty="0"/>
           </a:p>
@@ -2995,14 +2644,14 @@
       </p:sp>
       <p:sp>
         <p:nvSpPr>
-          <p:cNvPr id="33" name="Shape 31"/>
-          <p:cNvSpPr/>
-          <p:nvPr/>
-        </p:nvSpPr>
-        <p:spPr>
-          <a:xfrm>
-            <a:off x="548640" y="3995928"/>
-            <a:ext cx="50292" cy="475488"/>
+          <p:cNvPr id="24" name="Shape 22"/>
+          <p:cNvSpPr/>
+          <p:nvPr/>
+        </p:nvSpPr>
+        <p:spPr>
+          <a:xfrm>
+            <a:off x="8127797" y="1481328"/>
+            <a:ext cx="3515258" cy="45720"/>
           </a:xfrm>
           <a:prstGeom prst="rect">
             <a:avLst/>
@@ -3015,30 +2664,30 @@
       </p:sp>
       <p:sp>
         <p:nvSpPr>
-          <p:cNvPr id="34" name="Text 32"/>
-          <p:cNvSpPr/>
-          <p:nvPr/>
-        </p:nvSpPr>
-        <p:spPr>
-          <a:xfrm>
-            <a:off x="731520" y="3977640"/>
-            <a:ext cx="3291840" cy="256032"/>
-          </a:xfrm>
-          <a:prstGeom prst="rect">
-            <a:avLst/>
-          </a:prstGeom>
-          <a:noFill/>
-          <a:ln/>
-        </p:spPr>
-        <p:txBody>
-          <a:bodyPr wrap="square" rtlCol="0" anchor="ctr"/>
-          <a:lstStyle/>
-          <a:p>
-            <a:pPr indent="0" marL="0">
-              <a:buNone/>
-            </a:pPr>
-            <a:r>
-              <a:rPr lang="en-US" sz="1150" b="1" dirty="0">
+          <p:cNvPr id="25" name="Text 23"/>
+          <p:cNvSpPr/>
+          <p:nvPr/>
+        </p:nvSpPr>
+        <p:spPr>
+          <a:xfrm>
+            <a:off x="8127797" y="1627632"/>
+            <a:ext cx="3515258" cy="274320"/>
+          </a:xfrm>
+          <a:prstGeom prst="rect">
+            <a:avLst/>
+          </a:prstGeom>
+          <a:noFill/>
+          <a:ln/>
+        </p:spPr>
+        <p:txBody>
+          <a:bodyPr wrap="square" rtlCol="0" anchor="ctr"/>
+          <a:lstStyle/>
+          <a:p>
+            <a:pPr indent="0" marL="0">
+              <a:buNone/>
+            </a:pPr>
+            <a:r>
+              <a:rPr lang="en-US" sz="1300" b="1" dirty="0">
                 <a:solidFill>
                   <a:srgbClr val="003D5B"/>
                 </a:solidFill>
@@ -3046,22 +2695,22 @@
                 <a:ea typeface="Calibri" pitchFamily="34" charset="-122"/>
                 <a:cs typeface="Calibri" pitchFamily="34" charset="-120"/>
               </a:rPr>
-              <a:t>What it needs before it can be built</a:t>
-            </a:r>
-            <a:endParaRPr lang="en-US" sz="1150" dirty="0"/>
-          </a:p>
-        </p:txBody>
-      </p:sp>
-      <p:sp>
-        <p:nvSpPr>
-          <p:cNvPr id="35" name="Text 33"/>
-          <p:cNvSpPr/>
-          <p:nvPr/>
-        </p:nvSpPr>
-        <p:spPr>
-          <a:xfrm>
-            <a:off x="4114800" y="3977640"/>
-            <a:ext cx="7436815" cy="457200"/>
+              <a:t>Our sourcing assessment</a:t>
+            </a:r>
+            <a:endParaRPr lang="en-US" sz="1300" dirty="0"/>
+          </a:p>
+        </p:txBody>
+      </p:sp>
+      <p:sp>
+        <p:nvSpPr>
+          <p:cNvPr id="26" name="Text 24"/>
+          <p:cNvSpPr/>
+          <p:nvPr/>
+        </p:nvSpPr>
+        <p:spPr>
+          <a:xfrm>
+            <a:off x="8127797" y="1938528"/>
+            <a:ext cx="3515258" cy="658368"/>
           </a:xfrm>
           <a:prstGeom prst="rect">
             <a:avLst/>
@@ -3085,7 +2734,7 @@
                 <a:ea typeface="Calibri" pitchFamily="34" charset="-122"/>
                 <a:cs typeface="Calibri" pitchFamily="34" charset="-120"/>
               </a:rPr>
-              <a:t>The data or decision that would unblock it. This column is the agenda for today.</a:t>
+              <a:t>Where something is not built, the file says plainly what it would need before it could be.</a:t>
             </a:r>
             <a:endParaRPr lang="en-US" sz="1000" dirty="0"/>
           </a:p>
@@ -3093,112 +2742,14 @@
       </p:sp>
       <p:sp>
         <p:nvSpPr>
-          <p:cNvPr id="36" name="Shape 34"/>
-          <p:cNvSpPr/>
-          <p:nvPr/>
-        </p:nvSpPr>
-        <p:spPr>
-          <a:xfrm>
-            <a:off x="548640" y="4562856"/>
-            <a:ext cx="50292" cy="475488"/>
-          </a:xfrm>
-          <a:prstGeom prst="rect">
-            <a:avLst/>
-          </a:prstGeom>
-          <a:solidFill>
-            <a:srgbClr val="009B8A"/>
-          </a:solidFill>
-          <a:ln/>
-        </p:spPr>
-      </p:sp>
-      <p:sp>
-        <p:nvSpPr>
-          <p:cNvPr id="37" name="Text 35"/>
-          <p:cNvSpPr/>
-          <p:nvPr/>
-        </p:nvSpPr>
-        <p:spPr>
-          <a:xfrm>
-            <a:off x="731520" y="4544568"/>
-            <a:ext cx="3291840" cy="256032"/>
-          </a:xfrm>
-          <a:prstGeom prst="rect">
-            <a:avLst/>
-          </a:prstGeom>
-          <a:noFill/>
-          <a:ln/>
-        </p:spPr>
-        <p:txBody>
-          <a:bodyPr wrap="square" rtlCol="0" anchor="ctr"/>
-          <a:lstStyle/>
-          <a:p>
-            <a:pPr indent="0" marL="0">
-              <a:buNone/>
-            </a:pPr>
-            <a:r>
-              <a:rPr lang="en-US" sz="1150" b="1" dirty="0">
-                <a:solidFill>
-                  <a:srgbClr val="003D5B"/>
-                </a:solidFill>
-                <a:latin typeface="Calibri" pitchFamily="34" charset="0"/>
-                <a:ea typeface="Calibri" pitchFamily="34" charset="-122"/>
-                <a:cs typeface="Calibri" pitchFamily="34" charset="-120"/>
-              </a:rPr>
-              <a:t>Slide</a:t>
-            </a:r>
-            <a:endParaRPr lang="en-US" sz="1150" dirty="0"/>
-          </a:p>
-        </p:txBody>
-      </p:sp>
-      <p:sp>
-        <p:nvSpPr>
-          <p:cNvPr id="38" name="Text 36"/>
-          <p:cNvSpPr/>
-          <p:nvPr/>
-        </p:nvSpPr>
-        <p:spPr>
-          <a:xfrm>
-            <a:off x="4114800" y="4544568"/>
-            <a:ext cx="7436815" cy="457200"/>
-          </a:xfrm>
-          <a:prstGeom prst="rect">
-            <a:avLst/>
-          </a:prstGeom>
-          <a:noFill/>
-          <a:ln/>
-        </p:spPr>
-        <p:txBody>
-          <a:bodyPr wrap="square" rtlCol="0" anchor="t"/>
-          <a:lstStyle/>
-          <a:p>
-            <a:pPr indent="0" marL="0">
-              <a:buNone/>
-            </a:pPr>
-            <a:r>
-              <a:rPr lang="en-US" sz="1000" dirty="0">
-                <a:solidFill>
-                  <a:srgbClr val="333333"/>
-                </a:solidFill>
-                <a:latin typeface="Calibri" pitchFamily="34" charset="0"/>
-                <a:ea typeface="Calibri" pitchFamily="34" charset="-122"/>
-                <a:cs typeface="Calibri" pitchFamily="34" charset="-120"/>
-              </a:rPr>
-              <a:t>Where the requirement appears in the prototype, so you can see it working.</a:t>
-            </a:r>
-            <a:endParaRPr lang="en-US" sz="1000" dirty="0"/>
-          </a:p>
-        </p:txBody>
-      </p:sp>
-      <p:sp>
-        <p:nvSpPr>
-          <p:cNvPr id="39" name="Shape 37"/>
-          <p:cNvSpPr/>
-          <p:nvPr/>
-        </p:nvSpPr>
-        <p:spPr>
-          <a:xfrm>
-            <a:off x="548640" y="5239512"/>
-            <a:ext cx="11094415" cy="566928"/>
+          <p:cNvPr id="27" name="Shape 25"/>
+          <p:cNvSpPr/>
+          <p:nvPr/>
+        </p:nvSpPr>
+        <p:spPr>
+          <a:xfrm>
+            <a:off x="548640" y="2724912"/>
+            <a:ext cx="11094415" cy="2432304"/>
           </a:xfrm>
           <a:prstGeom prst="rect">
             <a:avLst/>
@@ -3216,30 +2767,559 @@
       </p:sp>
       <p:sp>
         <p:nvSpPr>
+          <p:cNvPr id="28" name="Text 26"/>
+          <p:cNvSpPr/>
+          <p:nvPr/>
+        </p:nvSpPr>
+        <p:spPr>
+          <a:xfrm>
+            <a:off x="804672" y="2852928"/>
+            <a:ext cx="4572000" cy="237744"/>
+          </a:xfrm>
+          <a:prstGeom prst="rect">
+            <a:avLst/>
+          </a:prstGeom>
+          <a:noFill/>
+          <a:ln/>
+        </p:spPr>
+        <p:txBody>
+          <a:bodyPr wrap="square" rtlCol="0" anchor="ctr"/>
+          <a:lstStyle/>
+          <a:p>
+            <a:pPr indent="0" marL="0">
+              <a:buNone/>
+            </a:pPr>
+            <a:r>
+              <a:rPr lang="en-US" sz="1000" b="1" spc="140" kern="0" dirty="0">
+                <a:solidFill>
+                  <a:srgbClr val="003D5B"/>
+                </a:solidFill>
+                <a:latin typeface="Calibri" pitchFamily="34" charset="0"/>
+                <a:ea typeface="Calibri" pitchFamily="34" charset="-122"/>
+                <a:cs typeface="Calibri" pitchFamily="34" charset="-120"/>
+              </a:rPr>
+              <a:t>WHAT THE COLOURS MEAN</a:t>
+            </a:r>
+            <a:endParaRPr lang="en-US" sz="1000" dirty="0"/>
+          </a:p>
+        </p:txBody>
+      </p:sp>
+      <p:sp>
+        <p:nvSpPr>
+          <p:cNvPr id="29" name="Text 27"/>
+          <p:cNvSpPr/>
+          <p:nvPr/>
+        </p:nvSpPr>
+        <p:spPr>
+          <a:xfrm>
+            <a:off x="6796735" y="2852928"/>
+            <a:ext cx="4572000" cy="237744"/>
+          </a:xfrm>
+          <a:prstGeom prst="rect">
+            <a:avLst/>
+          </a:prstGeom>
+          <a:noFill/>
+          <a:ln/>
+        </p:spPr>
+        <p:txBody>
+          <a:bodyPr wrap="square" rtlCol="0" anchor="ctr"/>
+          <a:lstStyle/>
+          <a:p>
+            <a:pPr algn="r" indent="0" marL="0">
+              <a:buNone/>
+            </a:pPr>
+            <a:r>
+              <a:rPr lang="en-US" sz="950" i="1" dirty="0">
+                <a:solidFill>
+                  <a:srgbClr val="6B7280"/>
+                </a:solidFill>
+                <a:latin typeface="Calibri" pitchFamily="34" charset="0"/>
+                <a:ea typeface="Calibri" pitchFamily="34" charset="-122"/>
+                <a:cs typeface="Calibri" pitchFamily="34" charset="-120"/>
+              </a:rPr>
+              <a:t>The workbook carries no legend — this is the key.</a:t>
+            </a:r>
+            <a:endParaRPr lang="en-US" sz="950" dirty="0"/>
+          </a:p>
+        </p:txBody>
+      </p:sp>
+      <p:sp>
+        <p:nvSpPr>
+          <p:cNvPr id="30" name="Shape 28"/>
+          <p:cNvSpPr/>
+          <p:nvPr/>
+        </p:nvSpPr>
+        <p:spPr>
+          <a:xfrm>
+            <a:off x="822960" y="3182112"/>
+            <a:ext cx="603504" cy="329184"/>
+          </a:xfrm>
+          <a:prstGeom prst="rect">
+            <a:avLst/>
+          </a:prstGeom>
+          <a:solidFill>
+            <a:srgbClr val="FFFFFF"/>
+          </a:solidFill>
+          <a:ln w="12700">
+            <a:solidFill>
+              <a:srgbClr val="C9D2D7"/>
+            </a:solidFill>
+            <a:prstDash val="solid"/>
+          </a:ln>
+        </p:spPr>
+      </p:sp>
+      <p:sp>
+        <p:nvSpPr>
+          <p:cNvPr id="31" name="Text 29"/>
+          <p:cNvSpPr/>
+          <p:nvPr/>
+        </p:nvSpPr>
+        <p:spPr>
+          <a:xfrm>
+            <a:off x="1536192" y="3200400"/>
+            <a:ext cx="868680" cy="274320"/>
+          </a:xfrm>
+          <a:prstGeom prst="rect">
+            <a:avLst/>
+          </a:prstGeom>
+          <a:noFill/>
+          <a:ln/>
+        </p:spPr>
+        <p:txBody>
+          <a:bodyPr wrap="square" rtlCol="0" anchor="ctr"/>
+          <a:lstStyle/>
+          <a:p>
+            <a:pPr indent="0" marL="0">
+              <a:buNone/>
+            </a:pPr>
+            <a:r>
+              <a:rPr lang="en-US" sz="1100" b="1" dirty="0">
+                <a:solidFill>
+                  <a:srgbClr val="003D5B"/>
+                </a:solidFill>
+                <a:latin typeface="Calibri" pitchFamily="34" charset="0"/>
+                <a:ea typeface="Calibri" pitchFamily="34" charset="-122"/>
+                <a:cs typeface="Calibri" pitchFamily="34" charset="-120"/>
+              </a:rPr>
+              <a:t>No fill</a:t>
+            </a:r>
+            <a:endParaRPr lang="en-US" sz="1100" dirty="0"/>
+          </a:p>
+        </p:txBody>
+      </p:sp>
+      <p:sp>
+        <p:nvSpPr>
+          <p:cNvPr id="32" name="Text 30"/>
+          <p:cNvSpPr/>
+          <p:nvPr/>
+        </p:nvSpPr>
+        <p:spPr>
+          <a:xfrm>
+            <a:off x="2468880" y="3200400"/>
+            <a:ext cx="4114800" cy="274320"/>
+          </a:xfrm>
+          <a:prstGeom prst="rect">
+            <a:avLst/>
+          </a:prstGeom>
+          <a:noFill/>
+          <a:ln/>
+        </p:spPr>
+        <p:txBody>
+          <a:bodyPr wrap="square" rtlCol="0" anchor="ctr"/>
+          <a:lstStyle/>
+          <a:p>
+            <a:pPr indent="0" marL="0">
+              <a:buNone/>
+            </a:pPr>
+            <a:r>
+              <a:rPr lang="en-US" sz="1100" dirty="0">
+                <a:solidFill>
+                  <a:srgbClr val="333333"/>
+                </a:solidFill>
+                <a:latin typeface="Calibri" pitchFamily="34" charset="0"/>
+                <a:ea typeface="Calibri" pitchFamily="34" charset="-122"/>
+                <a:cs typeface="Calibri" pitchFamily="34" charset="-120"/>
+              </a:rPr>
+              <a:t>Built the way you asked for it.</a:t>
+            </a:r>
+            <a:endParaRPr lang="en-US" sz="1100" dirty="0"/>
+          </a:p>
+        </p:txBody>
+      </p:sp>
+      <p:sp>
+        <p:nvSpPr>
+          <p:cNvPr id="33" name="Text 31"/>
+          <p:cNvSpPr/>
+          <p:nvPr/>
+        </p:nvSpPr>
+        <p:spPr>
+          <a:xfrm>
+            <a:off x="6720840" y="3209544"/>
+            <a:ext cx="4693615" cy="292608"/>
+          </a:xfrm>
+          <a:prstGeom prst="rect">
+            <a:avLst/>
+          </a:prstGeom>
+          <a:noFill/>
+          <a:ln/>
+        </p:spPr>
+        <p:txBody>
+          <a:bodyPr wrap="square" rtlCol="0" anchor="t"/>
+          <a:lstStyle/>
+          <a:p>
+            <a:pPr indent="0" marL="0">
+              <a:buNone/>
+            </a:pPr>
+            <a:r>
+              <a:rPr lang="en-US" sz="950" i="1" dirty="0">
+                <a:solidFill>
+                  <a:srgbClr val="6B7280"/>
+                </a:solidFill>
+                <a:latin typeface="Calibri" pitchFamily="34" charset="0"/>
+                <a:ea typeface="Calibri" pitchFamily="34" charset="-122"/>
+                <a:cs typeface="Calibri" pitchFamily="34" charset="-120"/>
+              </a:rPr>
+              <a:t>Nothing to discuss unless you want it changed.</a:t>
+            </a:r>
+            <a:endParaRPr lang="en-US" sz="950" dirty="0"/>
+          </a:p>
+        </p:txBody>
+      </p:sp>
+      <p:sp>
+        <p:nvSpPr>
+          <p:cNvPr id="34" name="Shape 32"/>
+          <p:cNvSpPr/>
+          <p:nvPr/>
+        </p:nvSpPr>
+        <p:spPr>
+          <a:xfrm>
+            <a:off x="822960" y="3657600"/>
+            <a:ext cx="603504" cy="329184"/>
+          </a:xfrm>
+          <a:prstGeom prst="rect">
+            <a:avLst/>
+          </a:prstGeom>
+          <a:solidFill>
+            <a:srgbClr val="DBEEF4"/>
+          </a:solidFill>
+          <a:ln w="12700">
+            <a:solidFill>
+              <a:srgbClr val="8FBFD4"/>
+            </a:solidFill>
+            <a:prstDash val="solid"/>
+          </a:ln>
+        </p:spPr>
+      </p:sp>
+      <p:sp>
+        <p:nvSpPr>
+          <p:cNvPr id="35" name="Text 33"/>
+          <p:cNvSpPr/>
+          <p:nvPr/>
+        </p:nvSpPr>
+        <p:spPr>
+          <a:xfrm>
+            <a:off x="1536192" y="3675888"/>
+            <a:ext cx="868680" cy="274320"/>
+          </a:xfrm>
+          <a:prstGeom prst="rect">
+            <a:avLst/>
+          </a:prstGeom>
+          <a:noFill/>
+          <a:ln/>
+        </p:spPr>
+        <p:txBody>
+          <a:bodyPr wrap="square" rtlCol="0" anchor="ctr"/>
+          <a:lstStyle/>
+          <a:p>
+            <a:pPr indent="0" marL="0">
+              <a:buNone/>
+            </a:pPr>
+            <a:r>
+              <a:rPr lang="en-US" sz="1100" b="1" dirty="0">
+                <a:solidFill>
+                  <a:srgbClr val="003D5B"/>
+                </a:solidFill>
+                <a:latin typeface="Calibri" pitchFamily="34" charset="0"/>
+                <a:ea typeface="Calibri" pitchFamily="34" charset="-122"/>
+                <a:cs typeface="Calibri" pitchFamily="34" charset="-120"/>
+              </a:rPr>
+              <a:t>Blue</a:t>
+            </a:r>
+            <a:endParaRPr lang="en-US" sz="1100" dirty="0"/>
+          </a:p>
+        </p:txBody>
+      </p:sp>
+      <p:sp>
+        <p:nvSpPr>
+          <p:cNvPr id="36" name="Text 34"/>
+          <p:cNvSpPr/>
+          <p:nvPr/>
+        </p:nvSpPr>
+        <p:spPr>
+          <a:xfrm>
+            <a:off x="2468880" y="3675888"/>
+            <a:ext cx="4114800" cy="274320"/>
+          </a:xfrm>
+          <a:prstGeom prst="rect">
+            <a:avLst/>
+          </a:prstGeom>
+          <a:noFill/>
+          <a:ln/>
+        </p:spPr>
+        <p:txBody>
+          <a:bodyPr wrap="square" rtlCol="0" anchor="ctr"/>
+          <a:lstStyle/>
+          <a:p>
+            <a:pPr indent="0" marL="0">
+              <a:buNone/>
+            </a:pPr>
+            <a:r>
+              <a:rPr lang="en-US" sz="1100" dirty="0">
+                <a:solidFill>
+                  <a:srgbClr val="333333"/>
+                </a:solidFill>
+                <a:latin typeface="Calibri" pitchFamily="34" charset="0"/>
+                <a:ea typeface="Calibri" pitchFamily="34" charset="-122"/>
+                <a:cs typeface="Calibri" pitchFamily="34" charset="-120"/>
+              </a:rPr>
+              <a:t>Built, but we swapped the measure for one that works better.</a:t>
+            </a:r>
+            <a:endParaRPr lang="en-US" sz="1100" dirty="0"/>
+          </a:p>
+        </p:txBody>
+      </p:sp>
+      <p:sp>
+        <p:nvSpPr>
+          <p:cNvPr id="37" name="Text 35"/>
+          <p:cNvSpPr/>
+          <p:nvPr/>
+        </p:nvSpPr>
+        <p:spPr>
+          <a:xfrm>
+            <a:off x="6720840" y="3685032"/>
+            <a:ext cx="4693615" cy="292608"/>
+          </a:xfrm>
+          <a:prstGeom prst="rect">
+            <a:avLst/>
+          </a:prstGeom>
+          <a:noFill/>
+          <a:ln/>
+        </p:spPr>
+        <p:txBody>
+          <a:bodyPr wrap="square" rtlCol="0" anchor="t"/>
+          <a:lstStyle/>
+          <a:p>
+            <a:pPr indent="0" marL="0">
+              <a:buNone/>
+            </a:pPr>
+            <a:r>
+              <a:rPr lang="en-US" sz="950" i="1" dirty="0">
+                <a:solidFill>
+                  <a:srgbClr val="6B7280"/>
+                </a:solidFill>
+                <a:latin typeface="Calibri" pitchFamily="34" charset="0"/>
+                <a:ea typeface="Calibri" pitchFamily="34" charset="-122"/>
+                <a:cs typeface="Calibri" pitchFamily="34" charset="-120"/>
+              </a:rPr>
+              <a:t>The reason column names what it became, and why.</a:t>
+            </a:r>
+            <a:endParaRPr lang="en-US" sz="950" dirty="0"/>
+          </a:p>
+        </p:txBody>
+      </p:sp>
+      <p:sp>
+        <p:nvSpPr>
+          <p:cNvPr id="38" name="Shape 36"/>
+          <p:cNvSpPr/>
+          <p:nvPr/>
+        </p:nvSpPr>
+        <p:spPr>
+          <a:xfrm>
+            <a:off x="822960" y="4133088"/>
+            <a:ext cx="603504" cy="329184"/>
+          </a:xfrm>
+          <a:prstGeom prst="rect">
+            <a:avLst/>
+          </a:prstGeom>
+          <a:solidFill>
+            <a:srgbClr val="FFF3E0"/>
+          </a:solidFill>
+          <a:ln w="12700">
+            <a:solidFill>
+              <a:srgbClr val="E3B778"/>
+            </a:solidFill>
+            <a:prstDash val="solid"/>
+          </a:ln>
+        </p:spPr>
+      </p:sp>
+      <p:sp>
+        <p:nvSpPr>
+          <p:cNvPr id="39" name="Text 37"/>
+          <p:cNvSpPr/>
+          <p:nvPr/>
+        </p:nvSpPr>
+        <p:spPr>
+          <a:xfrm>
+            <a:off x="1536192" y="4151376"/>
+            <a:ext cx="868680" cy="274320"/>
+          </a:xfrm>
+          <a:prstGeom prst="rect">
+            <a:avLst/>
+          </a:prstGeom>
+          <a:noFill/>
+          <a:ln/>
+        </p:spPr>
+        <p:txBody>
+          <a:bodyPr wrap="square" rtlCol="0" anchor="ctr"/>
+          <a:lstStyle/>
+          <a:p>
+            <a:pPr indent="0" marL="0">
+              <a:buNone/>
+            </a:pPr>
+            <a:r>
+              <a:rPr lang="en-US" sz="1100" b="1" dirty="0">
+                <a:solidFill>
+                  <a:srgbClr val="003D5B"/>
+                </a:solidFill>
+                <a:latin typeface="Calibri" pitchFamily="34" charset="0"/>
+                <a:ea typeface="Calibri" pitchFamily="34" charset="-122"/>
+                <a:cs typeface="Calibri" pitchFamily="34" charset="-120"/>
+              </a:rPr>
+              <a:t>Amber</a:t>
+            </a:r>
+            <a:endParaRPr lang="en-US" sz="1100" dirty="0"/>
+          </a:p>
+        </p:txBody>
+      </p:sp>
+      <p:sp>
+        <p:nvSpPr>
           <p:cNvPr id="40" name="Text 38"/>
           <p:cNvSpPr/>
           <p:nvPr/>
         </p:nvSpPr>
         <p:spPr>
           <a:xfrm>
-            <a:off x="749808" y="5312664"/>
-            <a:ext cx="2194560" cy="219456"/>
-          </a:xfrm>
-          <a:prstGeom prst="rect">
-            <a:avLst/>
-          </a:prstGeom>
-          <a:noFill/>
-          <a:ln/>
-        </p:spPr>
-        <p:txBody>
-          <a:bodyPr wrap="square" rtlCol="0" anchor="ctr"/>
-          <a:lstStyle/>
-          <a:p>
-            <a:pPr indent="0" marL="0">
-              <a:buNone/>
-            </a:pPr>
-            <a:r>
-              <a:rPr lang="en-US" sz="1050" b="1" dirty="0">
+            <a:off x="2468880" y="4151376"/>
+            <a:ext cx="4114800" cy="274320"/>
+          </a:xfrm>
+          <a:prstGeom prst="rect">
+            <a:avLst/>
+          </a:prstGeom>
+          <a:noFill/>
+          <a:ln/>
+        </p:spPr>
+        <p:txBody>
+          <a:bodyPr wrap="square" rtlCol="0" anchor="ctr"/>
+          <a:lstStyle/>
+          <a:p>
+            <a:pPr indent="0" marL="0">
+              <a:buNone/>
+            </a:pPr>
+            <a:r>
+              <a:rPr lang="en-US" sz="1100" dirty="0">
+                <a:solidFill>
+                  <a:srgbClr val="333333"/>
+                </a:solidFill>
+                <a:latin typeface="Calibri" pitchFamily="34" charset="0"/>
+                <a:ea typeface="Calibri" pitchFamily="34" charset="-122"/>
+                <a:cs typeface="Calibri" pitchFamily="34" charset="-120"/>
+              </a:rPr>
+              <a:t>Built — but look at these closely.</a:t>
+            </a:r>
+            <a:endParaRPr lang="en-US" sz="1100" dirty="0"/>
+          </a:p>
+        </p:txBody>
+      </p:sp>
+      <p:sp>
+        <p:nvSpPr>
+          <p:cNvPr id="41" name="Text 39"/>
+          <p:cNvSpPr/>
+          <p:nvPr/>
+        </p:nvSpPr>
+        <p:spPr>
+          <a:xfrm>
+            <a:off x="6720840" y="4160520"/>
+            <a:ext cx="4693615" cy="292608"/>
+          </a:xfrm>
+          <a:prstGeom prst="rect">
+            <a:avLst/>
+          </a:prstGeom>
+          <a:noFill/>
+          <a:ln/>
+        </p:spPr>
+        <p:txBody>
+          <a:bodyPr wrap="square" rtlCol="0" anchor="t"/>
+          <a:lstStyle/>
+          <a:p>
+            <a:pPr indent="0" marL="0">
+              <a:buNone/>
+            </a:pPr>
+            <a:r>
+              <a:rPr lang="en-US" sz="950" i="1" dirty="0">
+                <a:solidFill>
+                  <a:srgbClr val="6B7280"/>
+                </a:solidFill>
+                <a:latin typeface="Calibri" pitchFamily="34" charset="0"/>
+                <a:ea typeface="Calibri" pitchFamily="34" charset="-122"/>
+                <a:cs typeface="Calibri" pitchFamily="34" charset="-120"/>
+              </a:rPr>
+              <a:t>Either we proposed it ourselves, or it still needs a source confirmed. Tell us what to keep.</a:t>
+            </a:r>
+            <a:endParaRPr lang="en-US" sz="950" dirty="0"/>
+          </a:p>
+        </p:txBody>
+      </p:sp>
+      <p:sp>
+        <p:nvSpPr>
+          <p:cNvPr id="42" name="Shape 40"/>
+          <p:cNvSpPr/>
+          <p:nvPr/>
+        </p:nvSpPr>
+        <p:spPr>
+          <a:xfrm>
+            <a:off x="822960" y="4608576"/>
+            <a:ext cx="603504" cy="329184"/>
+          </a:xfrm>
+          <a:prstGeom prst="rect">
+            <a:avLst/>
+          </a:prstGeom>
+          <a:solidFill>
+            <a:srgbClr val="FCE4E4"/>
+          </a:solidFill>
+          <a:ln w="12700">
+            <a:solidFill>
+              <a:srgbClr val="E0A6A6"/>
+            </a:solidFill>
+            <a:prstDash val="solid"/>
+          </a:ln>
+        </p:spPr>
+      </p:sp>
+      <p:sp>
+        <p:nvSpPr>
+          <p:cNvPr id="43" name="Text 41"/>
+          <p:cNvSpPr/>
+          <p:nvPr/>
+        </p:nvSpPr>
+        <p:spPr>
+          <a:xfrm>
+            <a:off x="1536192" y="4626864"/>
+            <a:ext cx="868680" cy="274320"/>
+          </a:xfrm>
+          <a:prstGeom prst="rect">
+            <a:avLst/>
+          </a:prstGeom>
+          <a:noFill/>
+          <a:ln/>
+        </p:spPr>
+        <p:txBody>
+          <a:bodyPr wrap="square" rtlCol="0" anchor="ctr"/>
+          <a:lstStyle/>
+          <a:p>
+            <a:pPr indent="0" marL="0">
+              <a:buNone/>
+            </a:pPr>
+            <a:r>
+              <a:rPr lang="en-US" sz="1100" b="1" dirty="0">
                 <a:solidFill>
                   <a:srgbClr val="003D5B"/>
                 </a:solidFill>
@@ -3247,22 +3327,61 @@
                 <a:ea typeface="Calibri" pitchFamily="34" charset="-122"/>
                 <a:cs typeface="Calibri" pitchFamily="34" charset="-120"/>
               </a:rPr>
-              <a:t>A note on relabelling</a:t>
-            </a:r>
-            <a:endParaRPr lang="en-US" sz="1050" dirty="0"/>
-          </a:p>
-        </p:txBody>
-      </p:sp>
-      <p:sp>
-        <p:nvSpPr>
-          <p:cNvPr id="41" name="Text 39"/>
-          <p:cNvSpPr/>
-          <p:nvPr/>
-        </p:nvSpPr>
-        <p:spPr>
-          <a:xfrm>
-            <a:off x="3108960" y="5312664"/>
-            <a:ext cx="8351215" cy="384048"/>
+              <a:t>Red</a:t>
+            </a:r>
+            <a:endParaRPr lang="en-US" sz="1100" dirty="0"/>
+          </a:p>
+        </p:txBody>
+      </p:sp>
+      <p:sp>
+        <p:nvSpPr>
+          <p:cNvPr id="44" name="Text 42"/>
+          <p:cNvSpPr/>
+          <p:nvPr/>
+        </p:nvSpPr>
+        <p:spPr>
+          <a:xfrm>
+            <a:off x="2468880" y="4626864"/>
+            <a:ext cx="4114800" cy="274320"/>
+          </a:xfrm>
+          <a:prstGeom prst="rect">
+            <a:avLst/>
+          </a:prstGeom>
+          <a:noFill/>
+          <a:ln/>
+        </p:spPr>
+        <p:txBody>
+          <a:bodyPr wrap="square" rtlCol="0" anchor="ctr"/>
+          <a:lstStyle/>
+          <a:p>
+            <a:pPr indent="0" marL="0">
+              <a:buNone/>
+            </a:pPr>
+            <a:r>
+              <a:rPr lang="en-US" sz="1100" dirty="0">
+                <a:solidFill>
+                  <a:srgbClr val="333333"/>
+                </a:solidFill>
+                <a:latin typeface="Calibri" pitchFamily="34" charset="0"/>
+                <a:ea typeface="Calibri" pitchFamily="34" charset="-122"/>
+                <a:cs typeface="Calibri" pitchFamily="34" charset="-120"/>
+              </a:rPr>
+              <a:t>Not built. There is no source for it today.</a:t>
+            </a:r>
+            <a:endParaRPr lang="en-US" sz="1100" dirty="0"/>
+          </a:p>
+        </p:txBody>
+      </p:sp>
+      <p:sp>
+        <p:nvSpPr>
+          <p:cNvPr id="45" name="Text 43"/>
+          <p:cNvSpPr/>
+          <p:nvPr/>
+        </p:nvSpPr>
+        <p:spPr>
+          <a:xfrm>
+            <a:off x="6720840" y="4636008"/>
+            <a:ext cx="4693615" cy="292608"/>
           </a:xfrm>
           <a:prstGeom prst="rect">
             <a:avLst/>
@@ -3278,6 +3397,182 @@
               <a:buNone/>
             </a:pPr>
             <a:r>
+              <a:rPr lang="en-US" sz="950" i="1" dirty="0">
+                <a:solidFill>
+                  <a:srgbClr val="6B7280"/>
+                </a:solidFill>
+                <a:latin typeface="Calibri" pitchFamily="34" charset="0"/>
+                <a:ea typeface="Calibri" pitchFamily="34" charset="-122"/>
+                <a:cs typeface="Calibri" pitchFamily="34" charset="-120"/>
+              </a:rPr>
+              <a:t>The file says what we would need before it could be.</a:t>
+            </a:r>
+            <a:endParaRPr lang="en-US" sz="950" dirty="0"/>
+          </a:p>
+        </p:txBody>
+      </p:sp>
+      <p:sp>
+        <p:nvSpPr>
+          <p:cNvPr id="46" name="Text 44"/>
+          <p:cNvSpPr/>
+          <p:nvPr/>
+        </p:nvSpPr>
+        <p:spPr>
+          <a:xfrm>
+            <a:off x="548640" y="5303520"/>
+            <a:ext cx="11094415" cy="237744"/>
+          </a:xfrm>
+          <a:prstGeom prst="rect">
+            <a:avLst/>
+          </a:prstGeom>
+          <a:noFill/>
+          <a:ln/>
+        </p:spPr>
+        <p:txBody>
+          <a:bodyPr wrap="square" rtlCol="0" anchor="ctr"/>
+          <a:lstStyle/>
+          <a:p>
+            <a:pPr indent="0" marL="0">
+              <a:buNone/>
+            </a:pPr>
+            <a:r>
+              <a:rPr lang="en-US" sz="1000" b="1" spc="140" kern="0" dirty="0">
+                <a:solidFill>
+                  <a:srgbClr val="009B8A"/>
+                </a:solidFill>
+                <a:latin typeface="Calibri" pitchFamily="34" charset="0"/>
+                <a:ea typeface="Calibri" pitchFamily="34" charset="-122"/>
+                <a:cs typeface="Calibri" pitchFamily="34" charset="-120"/>
+              </a:rPr>
+              <a:t>WHAT WE NEED YOU TO DO WITH IT</a:t>
+            </a:r>
+            <a:endParaRPr lang="en-US" sz="1000" dirty="0"/>
+          </a:p>
+        </p:txBody>
+      </p:sp>
+      <p:sp>
+        <p:nvSpPr>
+          <p:cNvPr id="47" name="Shape 45"/>
+          <p:cNvSpPr/>
+          <p:nvPr/>
+        </p:nvSpPr>
+        <p:spPr>
+          <a:xfrm>
+            <a:off x="548640" y="5632704"/>
+            <a:ext cx="256032" cy="256032"/>
+          </a:xfrm>
+          <a:prstGeom prst="ellipse">
+            <a:avLst/>
+          </a:prstGeom>
+          <a:solidFill>
+            <a:srgbClr val="009B8A"/>
+          </a:solidFill>
+          <a:ln/>
+        </p:spPr>
+      </p:sp>
+      <p:sp>
+        <p:nvSpPr>
+          <p:cNvPr id="48" name="Text 46"/>
+          <p:cNvSpPr/>
+          <p:nvPr/>
+        </p:nvSpPr>
+        <p:spPr>
+          <a:xfrm>
+            <a:off x="548640" y="5650992"/>
+            <a:ext cx="256032" cy="219456"/>
+          </a:xfrm>
+          <a:prstGeom prst="rect">
+            <a:avLst/>
+          </a:prstGeom>
+          <a:noFill/>
+          <a:ln/>
+        </p:spPr>
+        <p:txBody>
+          <a:bodyPr wrap="square" rtlCol="0" anchor="ctr"/>
+          <a:lstStyle/>
+          <a:p>
+            <a:pPr algn="ctr" indent="0" marL="0">
+              <a:buNone/>
+            </a:pPr>
+            <a:r>
+              <a:rPr lang="en-US" sz="1100" b="1" dirty="0">
+                <a:solidFill>
+                  <a:srgbClr val="FFFFFF"/>
+                </a:solidFill>
+                <a:latin typeface="Calibri" pitchFamily="34" charset="0"/>
+                <a:ea typeface="Calibri" pitchFamily="34" charset="-122"/>
+                <a:cs typeface="Calibri" pitchFamily="34" charset="-120"/>
+              </a:rPr>
+              <a:t>1</a:t>
+            </a:r>
+            <a:endParaRPr lang="en-US" sz="1100" dirty="0"/>
+          </a:p>
+        </p:txBody>
+      </p:sp>
+      <p:sp>
+        <p:nvSpPr>
+          <p:cNvPr id="49" name="Text 47"/>
+          <p:cNvSpPr/>
+          <p:nvPr/>
+        </p:nvSpPr>
+        <p:spPr>
+          <a:xfrm>
+            <a:off x="896112" y="5614416"/>
+            <a:ext cx="3149498" cy="274320"/>
+          </a:xfrm>
+          <a:prstGeom prst="rect">
+            <a:avLst/>
+          </a:prstGeom>
+          <a:noFill/>
+          <a:ln/>
+        </p:spPr>
+        <p:txBody>
+          <a:bodyPr wrap="square" rtlCol="0" anchor="ctr"/>
+          <a:lstStyle/>
+          <a:p>
+            <a:pPr indent="0" marL="0">
+              <a:buNone/>
+            </a:pPr>
+            <a:r>
+              <a:rPr lang="en-US" sz="1300" b="1" dirty="0">
+                <a:solidFill>
+                  <a:srgbClr val="003D5B"/>
+                </a:solidFill>
+                <a:latin typeface="Calibri" pitchFamily="34" charset="0"/>
+                <a:ea typeface="Calibri" pitchFamily="34" charset="-122"/>
+                <a:cs typeface="Calibri" pitchFamily="34" charset="-120"/>
+              </a:rPr>
+              <a:t>Confirm</a:t>
+            </a:r>
+            <a:endParaRPr lang="en-US" sz="1300" dirty="0"/>
+          </a:p>
+        </p:txBody>
+      </p:sp>
+      <p:sp>
+        <p:nvSpPr>
+          <p:cNvPr id="50" name="Text 48"/>
+          <p:cNvSpPr/>
+          <p:nvPr/>
+        </p:nvSpPr>
+        <p:spPr>
+          <a:xfrm>
+            <a:off x="896112" y="5907024"/>
+            <a:ext cx="3131210" cy="548640"/>
+          </a:xfrm>
+          <a:prstGeom prst="rect">
+            <a:avLst/>
+          </a:prstGeom>
+          <a:noFill/>
+          <a:ln/>
+        </p:spPr>
+        <p:txBody>
+          <a:bodyPr wrap="square" rtlCol="0" anchor="t"/>
+          <a:lstStyle/>
+          <a:p>
+            <a:pPr indent="0" marL="0">
+              <a:buNone/>
+            </a:pPr>
+            <a:r>
               <a:rPr lang="en-US" sz="1000" dirty="0">
                 <a:solidFill>
                   <a:srgbClr val="333333"/>
@@ -3286,7 +3581,281 @@
                 <a:ea typeface="Calibri" pitchFamily="34" charset="-122"/>
                 <a:cs typeface="Calibri" pitchFamily="34" charset="-120"/>
               </a:rPr>
-              <a:t>Many requirements are built but renamed — "total EDRMS users" is live as "users with recorded activity, last 180 days". Those count as built. We will flag the renames as we go.</a:t>
+              <a:t>Where the design is right, say so and we lock it.</a:t>
+            </a:r>
+            <a:endParaRPr lang="en-US" sz="1000" dirty="0"/>
+          </a:p>
+        </p:txBody>
+      </p:sp>
+      <p:sp>
+        <p:nvSpPr>
+          <p:cNvPr id="51" name="Shape 49"/>
+          <p:cNvSpPr/>
+          <p:nvPr/>
+        </p:nvSpPr>
+        <p:spPr>
+          <a:xfrm>
+            <a:off x="4338218" y="5632704"/>
+            <a:ext cx="256032" cy="256032"/>
+          </a:xfrm>
+          <a:prstGeom prst="ellipse">
+            <a:avLst/>
+          </a:prstGeom>
+          <a:solidFill>
+            <a:srgbClr val="009B8A"/>
+          </a:solidFill>
+          <a:ln/>
+        </p:spPr>
+      </p:sp>
+      <p:sp>
+        <p:nvSpPr>
+          <p:cNvPr id="52" name="Text 50"/>
+          <p:cNvSpPr/>
+          <p:nvPr/>
+        </p:nvSpPr>
+        <p:spPr>
+          <a:xfrm>
+            <a:off x="4338218" y="5650992"/>
+            <a:ext cx="256032" cy="219456"/>
+          </a:xfrm>
+          <a:prstGeom prst="rect">
+            <a:avLst/>
+          </a:prstGeom>
+          <a:noFill/>
+          <a:ln/>
+        </p:spPr>
+        <p:txBody>
+          <a:bodyPr wrap="square" rtlCol="0" anchor="ctr"/>
+          <a:lstStyle/>
+          <a:p>
+            <a:pPr algn="ctr" indent="0" marL="0">
+              <a:buNone/>
+            </a:pPr>
+            <a:r>
+              <a:rPr lang="en-US" sz="1100" b="1" dirty="0">
+                <a:solidFill>
+                  <a:srgbClr val="FFFFFF"/>
+                </a:solidFill>
+                <a:latin typeface="Calibri" pitchFamily="34" charset="0"/>
+                <a:ea typeface="Calibri" pitchFamily="34" charset="-122"/>
+                <a:cs typeface="Calibri" pitchFamily="34" charset="-120"/>
+              </a:rPr>
+              <a:t>2</a:t>
+            </a:r>
+            <a:endParaRPr lang="en-US" sz="1100" dirty="0"/>
+          </a:p>
+        </p:txBody>
+      </p:sp>
+      <p:sp>
+        <p:nvSpPr>
+          <p:cNvPr id="53" name="Text 51"/>
+          <p:cNvSpPr/>
+          <p:nvPr/>
+        </p:nvSpPr>
+        <p:spPr>
+          <a:xfrm>
+            <a:off x="4685690" y="5614416"/>
+            <a:ext cx="3149498" cy="274320"/>
+          </a:xfrm>
+          <a:prstGeom prst="rect">
+            <a:avLst/>
+          </a:prstGeom>
+          <a:noFill/>
+          <a:ln/>
+        </p:spPr>
+        <p:txBody>
+          <a:bodyPr wrap="square" rtlCol="0" anchor="ctr"/>
+          <a:lstStyle/>
+          <a:p>
+            <a:pPr indent="0" marL="0">
+              <a:buNone/>
+            </a:pPr>
+            <a:r>
+              <a:rPr lang="en-US" sz="1300" b="1" dirty="0">
+                <a:solidFill>
+                  <a:srgbClr val="003D5B"/>
+                </a:solidFill>
+                <a:latin typeface="Calibri" pitchFamily="34" charset="0"/>
+                <a:ea typeface="Calibri" pitchFamily="34" charset="-122"/>
+                <a:cs typeface="Calibri" pitchFamily="34" charset="-120"/>
+              </a:rPr>
+              <a:t>Change</a:t>
+            </a:r>
+            <a:endParaRPr lang="en-US" sz="1300" dirty="0"/>
+          </a:p>
+        </p:txBody>
+      </p:sp>
+      <p:sp>
+        <p:nvSpPr>
+          <p:cNvPr id="54" name="Text 52"/>
+          <p:cNvSpPr/>
+          <p:nvPr/>
+        </p:nvSpPr>
+        <p:spPr>
+          <a:xfrm>
+            <a:off x="4685690" y="5907024"/>
+            <a:ext cx="3131210" cy="548640"/>
+          </a:xfrm>
+          <a:prstGeom prst="rect">
+            <a:avLst/>
+          </a:prstGeom>
+          <a:noFill/>
+          <a:ln/>
+        </p:spPr>
+        <p:txBody>
+          <a:bodyPr wrap="square" rtlCol="0" anchor="t"/>
+          <a:lstStyle/>
+          <a:p>
+            <a:pPr indent="0" marL="0">
+              <a:buNone/>
+            </a:pPr>
+            <a:r>
+              <a:rPr lang="en-US" sz="1000" dirty="0">
+                <a:solidFill>
+                  <a:srgbClr val="333333"/>
+                </a:solidFill>
+                <a:latin typeface="Calibri" pitchFamily="34" charset="0"/>
+                <a:ea typeface="Calibri" pitchFamily="34" charset="-122"/>
+                <a:cs typeface="Calibri" pitchFamily="34" charset="-120"/>
+              </a:rPr>
+              <a:t>Mark up any mockup you want different. Layout, wording, grouping — all still open.</a:t>
+            </a:r>
+            <a:endParaRPr lang="en-US" sz="1000" dirty="0"/>
+          </a:p>
+        </p:txBody>
+      </p:sp>
+      <p:sp>
+        <p:nvSpPr>
+          <p:cNvPr id="55" name="Shape 53"/>
+          <p:cNvSpPr/>
+          <p:nvPr/>
+        </p:nvSpPr>
+        <p:spPr>
+          <a:xfrm>
+            <a:off x="8127797" y="5632704"/>
+            <a:ext cx="256032" cy="256032"/>
+          </a:xfrm>
+          <a:prstGeom prst="ellipse">
+            <a:avLst/>
+          </a:prstGeom>
+          <a:solidFill>
+            <a:srgbClr val="009B8A"/>
+          </a:solidFill>
+          <a:ln/>
+        </p:spPr>
+      </p:sp>
+      <p:sp>
+        <p:nvSpPr>
+          <p:cNvPr id="56" name="Text 54"/>
+          <p:cNvSpPr/>
+          <p:nvPr/>
+        </p:nvSpPr>
+        <p:spPr>
+          <a:xfrm>
+            <a:off x="8127797" y="5650992"/>
+            <a:ext cx="256032" cy="219456"/>
+          </a:xfrm>
+          <a:prstGeom prst="rect">
+            <a:avLst/>
+          </a:prstGeom>
+          <a:noFill/>
+          <a:ln/>
+        </p:spPr>
+        <p:txBody>
+          <a:bodyPr wrap="square" rtlCol="0" anchor="ctr"/>
+          <a:lstStyle/>
+          <a:p>
+            <a:pPr algn="ctr" indent="0" marL="0">
+              <a:buNone/>
+            </a:pPr>
+            <a:r>
+              <a:rPr lang="en-US" sz="1100" b="1" dirty="0">
+                <a:solidFill>
+                  <a:srgbClr val="FFFFFF"/>
+                </a:solidFill>
+                <a:latin typeface="Calibri" pitchFamily="34" charset="0"/>
+                <a:ea typeface="Calibri" pitchFamily="34" charset="-122"/>
+                <a:cs typeface="Calibri" pitchFamily="34" charset="-120"/>
+              </a:rPr>
+              <a:t>3</a:t>
+            </a:r>
+            <a:endParaRPr lang="en-US" sz="1100" dirty="0"/>
+          </a:p>
+        </p:txBody>
+      </p:sp>
+      <p:sp>
+        <p:nvSpPr>
+          <p:cNvPr id="57" name="Text 55"/>
+          <p:cNvSpPr/>
+          <p:nvPr/>
+        </p:nvSpPr>
+        <p:spPr>
+          <a:xfrm>
+            <a:off x="8475269" y="5614416"/>
+            <a:ext cx="3149498" cy="274320"/>
+          </a:xfrm>
+          <a:prstGeom prst="rect">
+            <a:avLst/>
+          </a:prstGeom>
+          <a:noFill/>
+          <a:ln/>
+        </p:spPr>
+        <p:txBody>
+          <a:bodyPr wrap="square" rtlCol="0" anchor="ctr"/>
+          <a:lstStyle/>
+          <a:p>
+            <a:pPr indent="0" marL="0">
+              <a:buNone/>
+            </a:pPr>
+            <a:r>
+              <a:rPr lang="en-US" sz="1300" b="1" dirty="0">
+                <a:solidFill>
+                  <a:srgbClr val="003D5B"/>
+                </a:solidFill>
+                <a:latin typeface="Calibri" pitchFamily="34" charset="0"/>
+                <a:ea typeface="Calibri" pitchFamily="34" charset="-122"/>
+                <a:cs typeface="Calibri" pitchFamily="34" charset="-120"/>
+              </a:rPr>
+              <a:t>Add</a:t>
+            </a:r>
+            <a:endParaRPr lang="en-US" sz="1300" dirty="0"/>
+          </a:p>
+        </p:txBody>
+      </p:sp>
+      <p:sp>
+        <p:nvSpPr>
+          <p:cNvPr id="58" name="Text 56"/>
+          <p:cNvSpPr/>
+          <p:nvPr/>
+        </p:nvSpPr>
+        <p:spPr>
+          <a:xfrm>
+            <a:off x="8475269" y="5907024"/>
+            <a:ext cx="3131210" cy="548640"/>
+          </a:xfrm>
+          <a:prstGeom prst="rect">
+            <a:avLst/>
+          </a:prstGeom>
+          <a:noFill/>
+          <a:ln/>
+        </p:spPr>
+        <p:txBody>
+          <a:bodyPr wrap="square" rtlCol="0" anchor="t"/>
+          <a:lstStyle/>
+          <a:p>
+            <a:pPr indent="0" marL="0">
+              <a:buNone/>
+            </a:pPr>
+            <a:r>
+              <a:rPr lang="en-US" sz="1000" dirty="0">
+                <a:solidFill>
+                  <a:srgbClr val="333333"/>
+                </a:solidFill>
+                <a:latin typeface="Calibri" pitchFamily="34" charset="0"/>
+                <a:ea typeface="Calibri" pitchFamily="34" charset="-122"/>
+                <a:cs typeface="Calibri" pitchFamily="34" charset="-120"/>
+              </a:rPr>
+              <a:t>Tell us what is missing. We will assess whether the system can supply it before we commit to it.</a:t>
             </a:r>
             <a:endParaRPr lang="en-US" sz="1000" dirty="0"/>
           </a:p>
